--- a/public/Yucu_Protocol_Dossier_Econometrico_Mixteca.pptx
+++ b/public/Yucu_Protocol_Dossier_Econometrico_Mixteca.pptx
@@ -2565,7 +2565,7 @@
                 <a:ea typeface="Calibri" pitchFamily="34" charset="-122"/>
                 <a:cs typeface="Calibri" pitchFamily="34" charset="-120"/>
               </a:rPr>
-              <a:t>• San Antonio Nduaxico: Invernaderos de tomate saladette (Josué Gerardo Sanjuan) - Vulnerabilidad extrema a 5 días de anaquel.</a:t>
+              <a:t>• San Antonio Nduaxico: Invernaderos de tomate saladette (productor local) - Vulnerabilidad extrema a 5 días de anaquel.</a:t>
             </a:r>
             <a:endParaRPr lang="en-US" sz="1100" dirty="0"/>
           </a:p>
@@ -2623,7 +2623,7 @@
                 <a:ea typeface="Calibri" pitchFamily="34" charset="-122"/>
                 <a:cs typeface="Calibri" pitchFamily="34" charset="-120"/>
               </a:rPr>
-              <a:t>• San Pablo Tijaltepec: Bordado fino de pepenado (Doña Francisca, 64 años) - 6 a 9 meses de confección desvalorizados por maquila.</a:t>
+              <a:t>• San Pablo Tijaltepec: Bordado fino de pepenado (bordadora de la comunidad) - 6 a 9 meses de confección desvalorizados por maquila.</a:t>
             </a:r>
             <a:endParaRPr lang="en-US" sz="1100" dirty="0"/>
           </a:p>
@@ -2652,7 +2652,7 @@
                 <a:ea typeface="Calibri" pitchFamily="34" charset="-122"/>
                 <a:cs typeface="Calibri" pitchFamily="34" charset="-120"/>
               </a:rPr>
-              <a:t>• San José Xochixtlán: Telar de cintura triqui (Doña Reyna, 56 años) - Descuentos arbitrarios impuestos a la entrega física.</a:t>
+              <a:t>• San José Xochixtlán: Telar de cintura triqui (tejedora de 56 años) - Descuentos arbitrarios impuestos a la entrega física.</a:t>
             </a:r>
             <a:endParaRPr lang="en-US" sz="1100" dirty="0"/>
           </a:p>
@@ -2681,7 +2681,7 @@
                 <a:ea typeface="Calibri" pitchFamily="34" charset="-122"/>
                 <a:cs typeface="Calibri" pitchFamily="34" charset="-120"/>
               </a:rPr>
-              <a:t>• Heroica Ciudad de Tlaxiaco: Fibras vegetales &amp; panadería artesanal de horno de leña (Guadalupe Avendaño).</a:t>
+              <a:t>• Heroica Ciudad de Tlaxiaco: Fibras vegetales &amp; panadería artesanal de horno de leña (panadera de la comunidad).</a:t>
             </a:r>
             <a:endParaRPr lang="en-US" sz="1100" dirty="0"/>
           </a:p>
@@ -6002,7 +6002,7 @@
                 <a:ea typeface="Calibri" pitchFamily="34" charset="-122"/>
                 <a:cs typeface="Calibri" pitchFamily="34" charset="-120"/>
               </a:rPr>
-              <a:t>El Contraejemplo: Doña Mercedes Cruz (Chocolate Artesanal)</a:t>
+              <a:t>El Contraejemplo: Productora de Chocolate Artesanal</a:t>
             </a:r>
             <a:endParaRPr lang="en-US" sz="2000" dirty="0"/>
           </a:p>
@@ -6275,7 +6275,7 @@
                 <a:ea typeface="Calibri" pitchFamily="34" charset="-122"/>
                 <a:cs typeface="Calibri" pitchFamily="34" charset="-120"/>
               </a:rPr>
-              <a:t>Doña Mercedes Cruz</a:t>
+              <a:t>Productora de chocolate, Oaxaca</a:t>
             </a:r>
             <a:endParaRPr lang="en-US" sz="1500" dirty="0"/>
           </a:p>
@@ -6599,7 +6599,7 @@
                 <a:ea typeface="Calibri" pitchFamily="34" charset="-122"/>
                 <a:cs typeface="Calibri" pitchFamily="34" charset="-120"/>
               </a:rPr>
-              <a:t>Mercedes Cruz demostró que un productor con canal directo y reputación verificable no puede ser extorsionado por acopiadores.</a:t>
+              <a:t>Esta productora demostró que un productor con canal directo y reputación verificable no puede ser extorsionado por acopiadores.</a:t>
             </a:r>
             <a:endParaRPr lang="en-US" sz="1100" dirty="0"/>
           </a:p>
